--- a/summary_report.pptx
+++ b/summary_report.pptx
@@ -3722,7 +3722,7 @@
                             <a:srgbClr val="333333"/>
                           </a:solidFill>
                           <a:latin typeface="Calibri"/>
-                          <a:hlinkClick r:id="rId2" action="ppaction://hlinkfile"/>
+                          <a:hlinkClick r:id="rId2" action="ppaction://hlinkpres?slideindex=12&amp;slidetitle=Monthly Price Comparison (|diff| &gt; 5)"/>
                         </a:rPr>
                         <a:t>company1</a:t>
                       </a:r>
@@ -3839,7 +3839,7 @@
                             <a:srgbClr val="333333"/>
                           </a:solidFill>
                           <a:latin typeface="Calibri"/>
-                          <a:hlinkClick r:id="rId3" action="ppaction://hlinkfile"/>
+                          <a:hlinkClick r:id="rId3" action="ppaction://hlinkpres?slideindex=12&amp;slidetitle=Monthly Price Comparison (|diff| &gt; 5)"/>
                         </a:rPr>
                         <a:t>company2</a:t>
                       </a:r>
@@ -3980,7 +3980,7 @@
                             <a:srgbClr val="333333"/>
                           </a:solidFill>
                           <a:latin typeface="Calibri"/>
-                          <a:hlinkClick r:id="rId4" action="ppaction://hlinkfile"/>
+                          <a:hlinkClick r:id="rId4" action="ppaction://hlinkpres?slideindex=12&amp;slidetitle=Monthly Price Comparison (|diff| &gt; 5)"/>
                         </a:rPr>
                         <a:t>company3</a:t>
                       </a:r>
